--- a/meeting/_generated/deck_v7.pptx
+++ b/meeting/_generated/deck_v7.pptx
@@ -8397,7 +8397,7 @@
                           <a:ea typeface="Arial" pitchFamily="34" charset="-122"/>
                           <a:cs typeface="Arial" pitchFamily="34" charset="-120"/>
                         </a:rPr>
-                        <a:t>35%</a:t>
+                        <a:t>33%</a:t>
                       </a:r>
                       <a:endParaRPr lang="en-US" sz="1050" dirty="0">
                         <a:latin typeface="Arial" charset="0"/>
